--- a/appunti/Presentazione_Interfacce_Funzionali_Java.pptx
+++ b/appunti/Presentazione_Interfacce_Funzionali_Java.pptx
@@ -3132,6 +3132,7 @@
               <a:defRPr sz="3000" b="1"/>
             </a:pPr>
             <a:r>
+              <a:rPr/>
               <a:t>Interfacce funzionali in Java</a:t>
             </a:r>
           </a:p>
@@ -3163,6 +3164,7 @@
               <a:defRPr sz="1600"/>
             </a:pPr>
             <a:r>
+              <a:rPr/>
               <a:t>Lambda expressions e java.util.function</a:t>
             </a:r>
           </a:p>
@@ -3197,6 +3199,7 @@
               <a:defRPr sz="2100"/>
             </a:pPr>
             <a:r>
+              <a:rPr/>
               <a:t>Che cos'è un'interfaccia funzionale</a:t>
             </a:r>
           </a:p>
@@ -3208,6 +3211,7 @@
               <a:defRPr sz="2100"/>
             </a:pPr>
             <a:r>
+              <a:rPr/>
               <a:t>@FunctionalInterface</a:t>
             </a:r>
           </a:p>
@@ -3219,6 +3223,7 @@
               <a:defRPr sz="2100"/>
             </a:pPr>
             <a:r>
+              <a:rPr/>
               <a:t>Lambda expressions</a:t>
             </a:r>
           </a:p>
@@ -3230,6 +3235,7 @@
               <a:defRPr sz="2100"/>
             </a:pPr>
             <a:r>
+              <a:rPr/>
               <a:t>Passare una funzionalità come argomento</a:t>
             </a:r>
           </a:p>
@@ -3241,6 +3247,7 @@
               <a:defRPr sz="2100"/>
             </a:pPr>
             <a:r>
+              <a:rPr/>
               <a:t>Predicate, Consumer, Supplier, Function</a:t>
             </a:r>
           </a:p>
@@ -3252,6 +3259,7 @@
               <a:defRPr sz="2100"/>
             </a:pPr>
             <a:r>
+              <a:rPr/>
               <a:t>Composizione delle funzionalità</a:t>
             </a:r>
           </a:p>
@@ -3263,6 +3271,7 @@
               <a:defRPr sz="2100"/>
             </a:pPr>
             <a:r>
+              <a:rPr/>
               <a:t>Esempi con collezioni e Stream</a:t>
             </a:r>
           </a:p>
@@ -3312,6 +3321,7 @@
               <a:defRPr sz="3000" b="1"/>
             </a:pPr>
             <a:r>
+              <a:rPr/>
               <a:t>Consumer&lt;T&gt;</a:t>
             </a:r>
           </a:p>
@@ -3343,6 +3353,7 @@
               <a:defRPr sz="1600"/>
             </a:pPr>
             <a:r>
+              <a:rPr/>
               <a:t>Un'azione che riceve un valore</a:t>
             </a:r>
           </a:p>
@@ -3395,15 +3406,18 @@
               </a:defRPr>
             </a:pPr>
             <a:r>
+              <a:rPr/>
               <a:t>Consumer&lt;String&gt; stampa =</a:t>
             </a:r>
             <a:br/>
             <a:r>
+              <a:rPr/>
               <a:t>    s -&gt; System.out.println("Messaggio: " + s);</a:t>
             </a:r>
             <a:br/>
             <a:br/>
             <a:r>
+              <a:rPr/>
               <a:t>stampa.accept("Hello");</a:t>
             </a:r>
           </a:p>
@@ -3438,6 +3452,7 @@
               <a:defRPr sz="1800"/>
             </a:pPr>
             <a:r>
+              <a:rPr/>
               <a:t>Metodo astratto: void accept(T t)</a:t>
             </a:r>
           </a:p>
@@ -3449,6 +3464,7 @@
               <a:defRPr sz="1800"/>
             </a:pPr>
             <a:r>
+              <a:rPr/>
               <a:t>Non restituisce un risultato.</a:t>
             </a:r>
           </a:p>
@@ -3460,6 +3476,7 @@
               <a:defRPr sz="1800"/>
             </a:pPr>
             <a:r>
+              <a:rPr/>
               <a:t>È particolarmente utile con forEach() e con le collezioni.</a:t>
             </a:r>
           </a:p>
@@ -3509,6 +3526,7 @@
               <a:defRPr sz="3000" b="1"/>
             </a:pPr>
             <a:r>
+              <a:rPr/>
               <a:t>Supplier&lt;T&gt;</a:t>
             </a:r>
           </a:p>
@@ -3540,6 +3558,7 @@
               <a:defRPr sz="1600"/>
             </a:pPr>
             <a:r>
+              <a:rPr/>
               <a:t>Fornisce un valore senza ricevere argomenti</a:t>
             </a:r>
           </a:p>
@@ -3592,11 +3611,13 @@
               </a:defRPr>
             </a:pPr>
             <a:r>
+              <a:rPr/>
               <a:t>Supplier&lt;Double&gt; casuale = () -&gt; Math.random();</a:t>
             </a:r>
             <a:br/>
             <a:br/>
             <a:r>
+              <a:rPr/>
               <a:t>Double valore = casuale.get();</a:t>
             </a:r>
           </a:p>
@@ -3631,6 +3652,7 @@
               <a:defRPr sz="1800"/>
             </a:pPr>
             <a:r>
+              <a:rPr/>
               <a:t>Metodo astratto: T get()</a:t>
             </a:r>
           </a:p>
@@ -3642,6 +3664,7 @@
               <a:defRPr sz="1800"/>
             </a:pPr>
             <a:r>
+              <a:rPr/>
               <a:t>Utile quando il valore deve essere prodotto solo quando richiesto.</a:t>
             </a:r>
           </a:p>
@@ -3653,6 +3676,7 @@
               <a:defRPr sz="1800"/>
             </a:pPr>
             <a:r>
+              <a:rPr/>
               <a:t>Può essere usato per generazione dinamica e lazy evaluation.</a:t>
             </a:r>
           </a:p>
@@ -3702,6 +3726,7 @@
               <a:defRPr sz="3000" b="1"/>
             </a:pPr>
             <a:r>
+              <a:rPr/>
               <a:t>Function&lt;T,R&gt;</a:t>
             </a:r>
           </a:p>
@@ -3733,6 +3758,7 @@
               <a:defRPr sz="1600"/>
             </a:pPr>
             <a:r>
+              <a:rPr/>
               <a:t>Trasforma un valore in un altro</a:t>
             </a:r>
           </a:p>
@@ -3785,15 +3811,18 @@
               </a:defRPr>
             </a:pPr>
             <a:r>
+              <a:rPr/>
               <a:t>Function&lt;String, Integer&gt; lunghezza =</a:t>
             </a:r>
             <a:br/>
             <a:r>
+              <a:rPr/>
               <a:t>    s -&gt; s.length();</a:t>
             </a:r>
             <a:br/>
             <a:br/>
             <a:r>
+              <a:rPr/>
               <a:t>Integer n = lunghezza.apply("Java");</a:t>
             </a:r>
           </a:p>
@@ -3828,6 +3857,7 @@
               <a:defRPr sz="1800"/>
             </a:pPr>
             <a:r>
+              <a:rPr/>
               <a:t>Metodo astratto: R apply(T t)</a:t>
             </a:r>
           </a:p>
@@ -3839,6 +3869,7 @@
               <a:defRPr sz="1800"/>
             </a:pPr>
             <a:r>
+              <a:rPr/>
               <a:t>T è il tipo di input, R il tipo di output.</a:t>
             </a:r>
           </a:p>
@@ -3850,6 +3881,7 @@
               <a:defRPr sz="1800"/>
             </a:pPr>
             <a:r>
+              <a:rPr/>
               <a:t>È molto usata per trasformare dati e con Stream.map().</a:t>
             </a:r>
           </a:p>
@@ -3899,6 +3931,7 @@
               <a:defRPr sz="3000" b="1"/>
             </a:pPr>
             <a:r>
+              <a:rPr/>
               <a:t>Comporre Function</a:t>
             </a:r>
           </a:p>
@@ -3951,23 +3984,28 @@
               </a:defRPr>
             </a:pPr>
             <a:r>
+              <a:rPr/>
               <a:t>Function&lt;String, Integer&gt; lunghezza = s -&gt; s.length();</a:t>
             </a:r>
             <a:br/>
             <a:r>
+              <a:rPr/>
               <a:t>Function&lt;Integer, String&gt; descrivi =</a:t>
             </a:r>
             <a:br/>
             <a:r>
+              <a:rPr/>
               <a:t>    n -&gt; "La lunghezza è " + n;</a:t>
             </a:r>
             <a:br/>
             <a:br/>
             <a:r>
+              <a:rPr/>
               <a:t>Function&lt;String, String&gt; completa =</a:t>
             </a:r>
             <a:br/>
             <a:r>
+              <a:rPr/>
               <a:t>    lunghezza.andThen(descrivi);</a:t>
             </a:r>
           </a:p>
@@ -4002,6 +4040,7 @@
               <a:defRPr sz="1600"/>
             </a:pPr>
             <a:r>
+              <a:rPr/>
               <a:t>andThen() applica prima una funzione e poi l'altra.</a:t>
             </a:r>
           </a:p>
@@ -4013,6 +4052,7 @@
               <a:defRPr sz="1600"/>
             </a:pPr>
             <a:r>
+              <a:rPr/>
               <a:t>Le funzioni possono essere concatenate per costruire trasformazioni più complesse.</a:t>
             </a:r>
           </a:p>
@@ -4062,6 +4102,7 @@
               <a:defRPr sz="3000" b="1"/>
             </a:pPr>
             <a:r>
+              <a:rPr/>
               <a:t>Interfacce funzionali e collezioni</a:t>
             </a:r>
           </a:p>
@@ -4114,20 +4155,24 @@
               </a:defRPr>
             </a:pPr>
             <a:r>
+              <a:rPr/>
               <a:t>List&lt;String&gt; nomi = Arrays.asList("Alice", "Bob", "Charlie");</a:t>
             </a:r>
             <a:br/>
             <a:br/>
             <a:r>
+              <a:rPr/>
               <a:t>Consumer&lt;String&gt; stampa = nome -&gt;</a:t>
             </a:r>
             <a:br/>
             <a:r>
+              <a:rPr/>
               <a:t>    System.out.println(nome);</a:t>
             </a:r>
             <a:br/>
             <a:br/>
             <a:r>
+              <a:rPr/>
               <a:t>nomi.forEach(stampa);</a:t>
             </a:r>
           </a:p>
@@ -4162,6 +4207,7 @@
               <a:defRPr sz="1600"/>
             </a:pPr>
             <a:r>
+              <a:rPr/>
               <a:t>Le lambda rendono concise operazioni comuni sulle collezioni.</a:t>
             </a:r>
           </a:p>
@@ -4173,6 +4219,7 @@
               <a:defRPr sz="1600"/>
             </a:pPr>
             <a:r>
+              <a:rPr/>
               <a:t>Predicate è utile per filtrare; Consumer per elaborare; Function per trasformare.</a:t>
             </a:r>
           </a:p>
@@ -4222,6 +4269,7 @@
               <a:defRPr sz="3000" b="1"/>
             </a:pPr>
             <a:r>
+              <a:rPr/>
               <a:t>Predicate con removeIf()</a:t>
             </a:r>
           </a:p>
@@ -4274,20 +4322,24 @@
               </a:defRPr>
             </a:pPr>
             <a:r>
+              <a:rPr/>
               <a:t>Predicate&lt;Utente&gt; assente = utente -&gt; utente.isAssente();</a:t>
             </a:r>
             <a:br/>
             <a:br/>
             <a:r>
+              <a:rPr/>
               <a:t>utenti.removeIf(assente);</a:t>
             </a:r>
             <a:br/>
             <a:br/>
             <a:r>
+              <a:rPr/>
               <a:t>// equivalente in forma compatta</a:t>
             </a:r>
             <a:br/>
             <a:r>
+              <a:rPr/>
               <a:t>utenti.removeIf(utente -&gt; utente.isAssente());</a:t>
             </a:r>
           </a:p>
@@ -4322,6 +4374,7 @@
               <a:defRPr sz="1600"/>
             </a:pPr>
             <a:r>
+              <a:rPr/>
               <a:t>removeIf() riceve un Predicate e rimuove gli elementi per cui la condizione è vera.</a:t>
             </a:r>
           </a:p>
@@ -4371,6 +4424,7 @@
               <a:defRPr sz="3000" b="1"/>
             </a:pPr>
             <a:r>
+              <a:rPr/>
               <a:t>Lambda e method reference</a:t>
             </a:r>
           </a:p>
@@ -4423,20 +4477,24 @@
               </a:defRPr>
             </a:pPr>
             <a:r>
+              <a:rPr/>
               <a:t>Consumer&lt;Utente&gt; stampa = u -&gt; stampaUtente(u);</a:t>
             </a:r>
             <a:br/>
             <a:br/>
             <a:r>
+              <a:rPr/>
               <a:t>// method reference</a:t>
             </a:r>
             <a:br/>
             <a:r>
+              <a:rPr/>
               <a:t>Consumer&lt;Utente&gt; stampa = Classe::stampaUtente;</a:t>
             </a:r>
             <a:br/>
             <a:br/>
             <a:r>
+              <a:rPr/>
               <a:t>utenti.forEach(stampa);</a:t>
             </a:r>
           </a:p>
@@ -4471,6 +4529,7 @@
               <a:defRPr sz="1600"/>
             </a:pPr>
             <a:r>
+              <a:rPr/>
               <a:t>Quando una lambda si limita a chiamare un metodo compatibile, è possibile usare una method reference.</a:t>
             </a:r>
           </a:p>
@@ -4482,6 +4541,7 @@
               <a:defRPr sz="1600"/>
             </a:pPr>
             <a:r>
+              <a:rPr/>
               <a:t>Sintassi: oggetto::metodo oppure Classe::metodo.</a:t>
             </a:r>
           </a:p>
@@ -4531,6 +4591,7 @@
               <a:defRPr sz="3000" b="1"/>
             </a:pPr>
             <a:r>
+              <a:rPr/>
               <a:t>Interfacce funzionali già presenti in Java</a:t>
             </a:r>
           </a:p>
@@ -4565,6 +4626,7 @@
               <a:defRPr sz="2100"/>
             </a:pPr>
             <a:r>
+              <a:rPr/>
               <a:t>Runnable → void run()</a:t>
             </a:r>
           </a:p>
@@ -4576,6 +4638,7 @@
               <a:defRPr sz="2100"/>
             </a:pPr>
             <a:r>
+              <a:rPr/>
               <a:t>Callable&lt;V&gt; → V call() throws Exception</a:t>
             </a:r>
           </a:p>
@@ -4587,6 +4650,7 @@
               <a:defRPr sz="2100"/>
             </a:pPr>
             <a:r>
+              <a:rPr/>
               <a:t>Comparator&lt;T&gt; → int compare(T o1, T o2)</a:t>
             </a:r>
           </a:p>
@@ -4598,6 +4662,7 @@
               <a:defRPr sz="2100"/>
             </a:pPr>
             <a:r>
+              <a:rPr/>
               <a:t>Queste interfacce esistevano già prima di Java 8.</a:t>
             </a:r>
           </a:p>
@@ -4609,6 +4674,7 @@
               <a:defRPr sz="2100"/>
             </a:pPr>
             <a:r>
+              <a:rPr/>
               <a:t>Java 8 ha reso possibile utilizzarle direttamente con le lambda.</a:t>
             </a:r>
           </a:p>
@@ -4658,6 +4724,7 @@
               <a:defRPr sz="3000" b="1"/>
             </a:pPr>
             <a:r>
+              <a:rPr/>
               <a:t>Mappa mentale</a:t>
             </a:r>
           </a:p>
@@ -4692,6 +4759,7 @@
               <a:defRPr sz="2000"/>
             </a:pPr>
             <a:r>
+              <a:rPr/>
               <a:t>Una interfaccia funzionale definisce un solo metodo astratto.</a:t>
             </a:r>
           </a:p>
@@ -4703,6 +4771,7 @@
               <a:defRPr sz="2000"/>
             </a:pPr>
             <a:r>
+              <a:rPr/>
               <a:t>Una lambda fornisce quel comportamento in forma concisa.</a:t>
             </a:r>
           </a:p>
@@ -4714,6 +4783,7 @@
               <a:defRPr sz="2000"/>
             </a:pPr>
             <a:r>
+              <a:rPr/>
               <a:t>Predicate → condizione</a:t>
             </a:r>
           </a:p>
@@ -4725,6 +4795,7 @@
               <a:defRPr sz="2000"/>
             </a:pPr>
             <a:r>
+              <a:rPr/>
               <a:t>Consumer → azione</a:t>
             </a:r>
           </a:p>
@@ -4736,6 +4807,7 @@
               <a:defRPr sz="2000"/>
             </a:pPr>
             <a:r>
+              <a:rPr/>
               <a:t>Supplier → fornitura di un valore</a:t>
             </a:r>
           </a:p>
@@ -4747,6 +4819,7 @@
               <a:defRPr sz="2000"/>
             </a:pPr>
             <a:r>
+              <a:rPr/>
               <a:t>Function → trasformazione</a:t>
             </a:r>
           </a:p>
@@ -4758,6 +4831,7 @@
               <a:defRPr sz="2000"/>
             </a:pPr>
             <a:r>
+              <a:rPr/>
               <a:t>Le funzionalità possono essere composte e passate come argomenti.</a:t>
             </a:r>
           </a:p>
@@ -4807,6 +4881,7 @@
               <a:defRPr sz="3000" b="1"/>
             </a:pPr>
             <a:r>
+              <a:rPr/>
               <a:t>Esercizio</a:t>
             </a:r>
           </a:p>
@@ -4838,6 +4913,7 @@
               <a:defRPr sz="1600"/>
             </a:pPr>
             <a:r>
+              <a:rPr/>
               <a:t>Lavorare con Predicate, Consumer, Supplier e Function</a:t>
             </a:r>
           </a:p>
@@ -4872,6 +4948,7 @@
               <a:defRPr sz="1800"/>
             </a:pPr>
             <a:r>
+              <a:rPr/>
               <a:t>Creare una lista di oggetti Studente con nome, età e media.</a:t>
             </a:r>
           </a:p>
@@ -4883,6 +4960,7 @@
               <a:defRPr sz="1800"/>
             </a:pPr>
             <a:r>
+              <a:rPr/>
               <a:t>Utilizzare un Predicate per selezionare gli studenti con media superiore a una soglia.</a:t>
             </a:r>
           </a:p>
@@ -4894,6 +4972,7 @@
               <a:defRPr sz="1800"/>
             </a:pPr>
             <a:r>
+              <a:rPr/>
               <a:t>Utilizzare un Consumer per stampare gli studenti selezionati.</a:t>
             </a:r>
           </a:p>
@@ -4905,6 +4984,7 @@
               <a:defRPr sz="1800"/>
             </a:pPr>
             <a:r>
+              <a:rPr/>
               <a:t>Utilizzare una Function per trasformare uno Studente nel suo nome.</a:t>
             </a:r>
           </a:p>
@@ -4916,6 +4996,7 @@
               <a:defRPr sz="1800"/>
             </a:pPr>
             <a:r>
+              <a:rPr/>
               <a:t>Utilizzare un Supplier per generare un valore o un nuovo oggetto.</a:t>
             </a:r>
           </a:p>
@@ -4927,6 +5008,7 @@
               <a:defRPr sz="1800"/>
             </a:pPr>
             <a:r>
+              <a:rPr/>
               <a:t>Provare a comporre almeno due funzionalità con i metodi disponibili.</a:t>
             </a:r>
           </a:p>
@@ -4976,6 +5058,7 @@
               <a:defRPr sz="3000" b="1"/>
             </a:pPr>
             <a:r>
+              <a:rPr/>
               <a:t>Che cos'è un'interfaccia funzionale?</a:t>
             </a:r>
           </a:p>
@@ -5010,6 +5093,7 @@
               <a:defRPr sz="2000"/>
             </a:pPr>
             <a:r>
+              <a:rPr/>
               <a:t>È un'interfaccia che contiene un solo metodo astratto.</a:t>
             </a:r>
           </a:p>
@@ -5021,6 +5105,7 @@
               <a:defRPr sz="2000"/>
             </a:pPr>
             <a:r>
+              <a:rPr/>
               <a:t>Quel metodo rappresenta il comportamento/contratto che può essere fornito dal chiamante.</a:t>
             </a:r>
           </a:p>
@@ -5032,6 +5117,7 @@
               <a:defRPr sz="2000"/>
             </a:pPr>
             <a:r>
+              <a:rPr/>
               <a:t>Può avere anche metodi default e static: il vincolo riguarda i metodi astratti.</a:t>
             </a:r>
           </a:p>
@@ -5043,6 +5129,7 @@
               <a:defRPr sz="2000"/>
             </a:pPr>
             <a:r>
+              <a:rPr/>
               <a:t>È strettamente collegata alle espressioni lambda.</a:t>
             </a:r>
           </a:p>
@@ -5092,6 +5179,7 @@
               <a:defRPr sz="3000" b="1"/>
             </a:pPr>
             <a:r>
+              <a:rPr/>
               <a:t>@FunctionalInterface</a:t>
             </a:r>
           </a:p>
@@ -5144,18 +5232,22 @@
               </a:defRPr>
             </a:pPr>
             <a:r>
+              <a:rPr/>
               <a:t>@FunctionalInterface</a:t>
             </a:r>
             <a:br/>
             <a:r>
+              <a:rPr/>
               <a:t>public interface OperazioneMatematica {</a:t>
             </a:r>
             <a:br/>
             <a:r>
+              <a:rPr/>
               <a:t>    int eseguiOperazione(int a, int b);</a:t>
             </a:r>
             <a:br/>
             <a:r>
+              <a:rPr/>
               <a:t>}</a:t>
             </a:r>
           </a:p>
@@ -5190,6 +5282,7 @@
               <a:defRPr sz="1800"/>
             </a:pPr>
             <a:r>
+              <a:rPr/>
               <a:t>@FunctionalInterface è opzionale ma consigliata.</a:t>
             </a:r>
           </a:p>
@@ -5201,6 +5294,7 @@
               <a:defRPr sz="1800"/>
             </a:pPr>
             <a:r>
+              <a:rPr/>
               <a:t>Il compilatore verifica che l'interfaccia abbia un solo metodo astratto.</a:t>
             </a:r>
           </a:p>
@@ -5212,6 +5306,7 @@
               <a:defRPr sz="1800"/>
             </a:pPr>
             <a:r>
+              <a:rPr/>
               <a:t>Se il contratto viene violato, viene segnalato un errore di compilazione.</a:t>
             </a:r>
           </a:p>
@@ -5261,6 +5356,7 @@
               <a:defRPr sz="3000" b="1"/>
             </a:pPr>
             <a:r>
+              <a:rPr/>
               <a:t>Lambda expression</a:t>
             </a:r>
           </a:p>
@@ -5313,11 +5409,13 @@
               </a:defRPr>
             </a:pPr>
             <a:r>
+              <a:rPr/>
               <a:t>OperazioneMatematica somma = (a, b) -&gt; a + b;</a:t>
             </a:r>
             <a:br/>
             <a:br/>
             <a:r>
+              <a:rPr/>
               <a:t>int risultato = somma.eseguiOperazione(3, 5);</a:t>
             </a:r>
           </a:p>
@@ -5352,6 +5450,7 @@
               <a:defRPr sz="1800"/>
             </a:pPr>
             <a:r>
+              <a:rPr/>
               <a:t>La lambda fornisce l'implementazione del metodo astratto.</a:t>
             </a:r>
           </a:p>
@@ -5363,6 +5462,7 @@
               <a:defRPr sz="1800"/>
             </a:pPr>
             <a:r>
+              <a:rPr/>
               <a:t>La sintassi elimina il codice ripetitivo di una classe anonima.</a:t>
             </a:r>
           </a:p>
@@ -5374,6 +5474,7 @@
               <a:defRPr sz="1800"/>
             </a:pPr>
             <a:r>
+              <a:rPr/>
               <a:t>Il tipo della lambda è determinato dal contesto: deve essere un'interfaccia funzionale compatibile.</a:t>
             </a:r>
           </a:p>
@@ -5423,6 +5524,7 @@
               <a:defRPr sz="3000" b="1"/>
             </a:pPr>
             <a:r>
+              <a:rPr/>
               <a:t>Da classe anonima a lambda</a:t>
             </a:r>
           </a:p>
@@ -5475,26 +5577,32 @@
               </a:defRPr>
             </a:pPr>
             <a:r>
+              <a:rPr/>
               <a:t>Comparator&lt;Utente&gt; comparator = new Comparator&lt;Utente&gt;() {</a:t>
             </a:r>
             <a:br/>
             <a:r>
+              <a:rPr/>
               <a:t>    @Override</a:t>
             </a:r>
             <a:br/>
             <a:r>
+              <a:rPr/>
               <a:t>    public int compare(Utente u1, Utente u2) {</a:t>
             </a:r>
             <a:br/>
             <a:r>
+              <a:rPr/>
               <a:t>        return u1.getId().compareTo(u2.getId());</a:t>
             </a:r>
             <a:br/>
             <a:r>
+              <a:rPr/>
               <a:t>    }</a:t>
             </a:r>
             <a:br/>
             <a:r>
+              <a:rPr/>
               <a:t>};</a:t>
             </a:r>
           </a:p>
@@ -5547,10 +5655,12 @@
               </a:defRPr>
             </a:pPr>
             <a:r>
+              <a:rPr/>
               <a:t>Comparator&lt;Utente&gt; comparator =</a:t>
             </a:r>
             <a:br/>
             <a:r>
+              <a:rPr/>
               <a:t>    (u1, u2) -&gt; u1.getId().compareTo(u2.getId());</a:t>
             </a:r>
           </a:p>
@@ -5600,6 +5710,7 @@
               <a:defRPr sz="3000" b="1"/>
             </a:pPr>
             <a:r>
+              <a:rPr/>
               <a:t>Passare una funzionalità</a:t>
             </a:r>
           </a:p>
@@ -5631,6 +5742,7 @@
               <a:defRPr sz="1600"/>
             </a:pPr>
             <a:r>
+              <a:rPr/>
               <a:t>Non passiamo solo dati: possiamo passare un comportamento</a:t>
             </a:r>
           </a:p>
@@ -5683,19 +5795,23 @@
               </a:defRPr>
             </a:pPr>
             <a:r>
+              <a:rPr/>
               <a:t>Runnable calcolaMedia = () -&gt; {</a:t>
             </a:r>
             <a:br/>
             <a:r>
+              <a:rPr/>
               <a:t>    // calcola la media dei voti</a:t>
             </a:r>
             <a:br/>
             <a:r>
+              <a:rPr/>
               <a:t>};</a:t>
             </a:r>
             <a:br/>
             <a:br/>
             <a:r>
+              <a:rPr/>
               <a:t>thread.submit(calcolaMedia);</a:t>
             </a:r>
           </a:p>
@@ -5730,6 +5846,7 @@
               <a:defRPr sz="1700"/>
             </a:pPr>
             <a:r>
+              <a:rPr/>
               <a:t>Runnable è una interfaccia funzionale con il metodo void run().</a:t>
             </a:r>
           </a:p>
@@ -5741,6 +5858,7 @@
               <a:defRPr sz="1700"/>
             </a:pPr>
             <a:r>
+              <a:rPr/>
               <a:t>La funzionalità può essere memorizzata in una variabile e passata a un metodo.</a:t>
             </a:r>
           </a:p>
@@ -5790,6 +5908,7 @@
               <a:defRPr sz="3000" b="1"/>
             </a:pPr>
             <a:r>
+              <a:rPr/>
               <a:t>Le principali interfacce di java.util.function</a:t>
             </a:r>
           </a:p>
@@ -5824,6 +5943,7 @@
               <a:defRPr sz="2100"/>
             </a:pPr>
             <a:r>
+              <a:rPr/>
               <a:t>Predicate&lt;T&gt; → riceve T e restituisce boolean</a:t>
             </a:r>
           </a:p>
@@ -5835,6 +5955,7 @@
               <a:defRPr sz="2100"/>
             </a:pPr>
             <a:r>
+              <a:rPr/>
               <a:t>Consumer&lt;T&gt; → riceve T e non restituisce un valore</a:t>
             </a:r>
           </a:p>
@@ -5846,6 +5967,7 @@
               <a:defRPr sz="2100"/>
             </a:pPr>
             <a:r>
+              <a:rPr/>
               <a:t>Supplier&lt;T&gt; → non riceve argomenti e fornisce T</a:t>
             </a:r>
           </a:p>
@@ -5857,6 +5979,7 @@
               <a:defRPr sz="2100"/>
             </a:pPr>
             <a:r>
+              <a:rPr/>
               <a:t>Function&lt;T,R&gt; → riceve T e restituisce R</a:t>
             </a:r>
           </a:p>
@@ -5868,6 +5991,7 @@
               <a:defRPr sz="2100"/>
             </a:pPr>
             <a:r>
+              <a:rPr/>
               <a:t>Queste interfacce sono generiche e pensate per operazioni molto comuni.</a:t>
             </a:r>
           </a:p>
@@ -5917,6 +6041,7 @@
               <a:defRPr sz="3000" b="1"/>
             </a:pPr>
             <a:r>
+              <a:rPr/>
               <a:t>Predicate&lt;T&gt;</a:t>
             </a:r>
           </a:p>
@@ -5948,6 +6073,7 @@
               <a:defRPr sz="1600"/>
             </a:pPr>
             <a:r>
+              <a:rPr/>
               <a:t>Una condizione che produce true o false</a:t>
             </a:r>
           </a:p>
@@ -6000,11 +6126,13 @@
               </a:defRPr>
             </a:pPr>
             <a:r>
+              <a:rPr/>
               <a:t>Predicate&lt;String&gt; lunga = s -&gt; s.length() &gt; 4;</a:t>
             </a:r>
             <a:br/>
             <a:br/>
             <a:r>
+              <a:rPr/>
               <a:t>boolean risultato = lunga.test("Java");</a:t>
             </a:r>
           </a:p>
@@ -6039,6 +6167,7 @@
               <a:defRPr sz="1800"/>
             </a:pPr>
             <a:r>
+              <a:rPr/>
               <a:t>Metodo astratto: boolean test(T t)</a:t>
             </a:r>
           </a:p>
@@ -6050,6 +6179,7 @@
               <a:defRPr sz="1800"/>
             </a:pPr>
             <a:r>
+              <a:rPr/>
               <a:t>Utile per condizioni, filtri e selezioni.</a:t>
             </a:r>
           </a:p>
@@ -6061,6 +6191,7 @@
               <a:defRPr sz="1800"/>
             </a:pPr>
             <a:r>
+              <a:rPr/>
               <a:t>I predicati possono essere combinati con and(), or() e negate().</a:t>
             </a:r>
           </a:p>
@@ -6110,6 +6241,7 @@
               <a:defRPr sz="3000" b="1"/>
             </a:pPr>
             <a:r>
+              <a:rPr/>
               <a:t>Comporre Predicate</a:t>
             </a:r>
           </a:p>
@@ -6162,15 +6294,18 @@
               </a:defRPr>
             </a:pPr>
             <a:r>
+              <a:rPr/>
               <a:t>Predicate&lt;Integer&gt; positivo = n -&gt; n &gt; 0;</a:t>
             </a:r>
             <a:br/>
             <a:r>
+              <a:rPr/>
               <a:t>Predicate&lt;Integer&gt; piccolo = n -&gt; n &lt; 10;</a:t>
             </a:r>
             <a:br/>
             <a:br/>
             <a:r>
+              <a:rPr/>
               <a:t>Predicate&lt;Integer&gt; valido = positivo.and(piccolo);</a:t>
             </a:r>
           </a:p>
@@ -6205,6 +6340,7 @@
               <a:defRPr sz="1800"/>
             </a:pPr>
             <a:r>
+              <a:rPr/>
               <a:t>I comportamenti possono essere composti invece di riscrivere la condizione.</a:t>
             </a:r>
           </a:p>
@@ -6216,6 +6352,7 @@
               <a:defRPr sz="1800"/>
             </a:pPr>
             <a:r>
+              <a:rPr/>
               <a:t>Metodi principali: and(), or(), negate().</a:t>
             </a:r>
           </a:p>
